--- a/dist/초6/수학/입체와측정/초6_수학_입체와측정_02_원기둥·원뿔·구_학생용.pptx
+++ b/dist/초6/수학/입체와측정/초6_수학_입체와측정_02_원기둥·원뿔·구_학생용.pptx
@@ -121,13 +121,13 @@
   <p:extLst>
     <p:ext uri="{521415D9-36F7-43E2-AB2F-B90AF26B5E84}">
       <p14:sectionLst xmlns:p14="http://schemas.microsoft.com/office/powerpoint/2010/main">
-        <p14:section name="도입" id="{687b6cf6-1929-989e-5a56-9e2463c1f445}">
+        <p14:section name="도입" id="{004e8d4a-bf50-cca4-51c3-378be1d2263a}">
           <p14:sldIdLst>
             <p14:sldId id="256"/>
             <p14:sldId id="257"/>
           </p14:sldIdLst>
         </p14:section>
-        <p14:section name="개념" id="{cd96fe7a-afdf-f3dd-9886-aae3f7bfc9cf}">
+        <p14:section name="개념" id="{b32de987-5bab-55b4-ac70-49cd05ba484a}">
           <p14:sldIdLst>
             <p14:sldId id="258"/>
             <p14:sldId id="259"/>
@@ -136,7 +136,7 @@
             <p14:sldId id="264"/>
           </p14:sldIdLst>
         </p14:section>
-        <p14:section name="연습" id="{1c03fc0b-b53c-df35-bbe7-ca8b478dbcbb}">
+        <p14:section name="연습" id="{b12c405d-a8f7-07db-9e3e-df78ed088fa0}">
           <p14:sldIdLst>
             <p14:sldId id="262"/>
             <p14:sldId id="263"/>
@@ -144,24 +144,24 @@
             <p14:sldId id="266"/>
           </p14:sldIdLst>
         </p14:section>
-        <p14:section name="개념" id="{a7a696be-7858-4470-ff74-04c87d93d657}">
+        <p14:section name="개념" id="{bf648144-81d3-f329-42aa-813f866d393b}">
           <p14:sldIdLst/>
         </p14:section>
-        <p14:section name="연습" id="{f40989f9-7f4c-17fc-bbb4-09769ad40033}">
+        <p14:section name="연습" id="{977f7969-fb3b-3303-c085-efbe01d22046}">
           <p14:sldIdLst/>
         </p14:section>
-        <p14:section name="확인" id="{a198adfc-79d6-5bd9-5769-a50dd53c030c}">
+        <p14:section name="확인" id="{3f125067-809c-72c7-a187-319543a02c1b}">
           <p14:sldIdLst>
             <p14:sldId id="267"/>
             <p14:sldId id="268"/>
           </p14:sldIdLst>
         </p14:section>
-        <p14:section name="정리" id="{9eef013f-edfb-cfe6-b69e-7eed0a78b8d7}">
+        <p14:section name="정리" id="{69816461-df3d-9a31-331a-714d07c858a5}">
           <p14:sldIdLst>
             <p14:sldId id="269"/>
           </p14:sldIdLst>
         </p14:section>
-        <p14:section name="보충" id="{41ef34cf-8309-84f3-a28e-cf340b020497}">
+        <p14:section name="보충" id="{a2377d45-f969-c67e-6c61-8ecaf8649d9e}">
           <p14:sldIdLst>
             <p14:sldId id="270"/>
           </p14:sldIdLst>
@@ -4979,8 +4979,8 @@
         </p:nvSpPr>
         <p:spPr>
           <a:xfrm>
-            <a:off x="7431044" y="2553789"/>
-            <a:ext cx="2804527" cy="1338943"/>
+            <a:off x="7535977" y="2599770"/>
+            <a:ext cx="2611904" cy="1246980"/>
           </a:xfrm>
           <a:custGeom>
             <a:avLst/>
@@ -4989,15 +4989,15 @@
             <a:cxnLst/>
             <a:rect l="l" t="t" r="r" b="b"/>
             <a:pathLst>
-              <a:path w="2804527" h="1338943">
+              <a:path w="2611904" h="1246980">
                 <a:moveTo>
-                  <a:pt x="0" y="1338943"/>
+                  <a:pt x="0" y="1246980"/>
                 </a:moveTo>
                 <a:lnTo>
-                  <a:pt x="2804527" y="1338943"/>
-                </a:lnTo>
-                <a:lnTo>
-                  <a:pt x="2804527" y="0"/>
+                  <a:pt x="2611904" y="1246980"/>
+                </a:lnTo>
+                <a:lnTo>
+                  <a:pt x="2611904" y="0"/>
                 </a:lnTo>
                 <a:lnTo>
                   <a:pt x="0" y="0"/>
@@ -5025,8 +5025,8 @@
         </p:nvSpPr>
         <p:spPr>
           <a:xfrm>
-            <a:off x="7570518" y="1661160"/>
-            <a:ext cx="892629" cy="892629"/>
+            <a:off x="7665871" y="1768450"/>
+            <a:ext cx="831320" cy="831320"/>
           </a:xfrm>
           <a:prstGeom prst="ellipse">
             <a:avLst/>
@@ -5050,8 +5050,8 @@
         </p:nvSpPr>
         <p:spPr>
           <a:xfrm>
-            <a:off x="7570518" y="3892731"/>
-            <a:ext cx="892629" cy="892629"/>
+            <a:off x="7665871" y="3846750"/>
+            <a:ext cx="831320" cy="831320"/>
           </a:xfrm>
           <a:prstGeom prst="ellipse">
             <a:avLst/>
@@ -5075,8 +5075,8 @@
         </p:nvSpPr>
         <p:spPr>
           <a:xfrm>
-            <a:off x="7431044" y="3062587"/>
-            <a:ext cx="2804527" cy="0"/>
+            <a:off x="7535977" y="3073622"/>
+            <a:ext cx="2611904" cy="0"/>
           </a:xfrm>
           <a:prstGeom prst="line">
             <a:avLst/>
@@ -5100,8 +5100,8 @@
         </p:nvSpPr>
         <p:spPr>
           <a:xfrm flipV="1">
-            <a:off x="10486624" y="2553789"/>
-            <a:ext cx="0" cy="1338943"/>
+            <a:off x="10381691" y="2599770"/>
+            <a:ext cx="0" cy="1246980"/>
           </a:xfrm>
           <a:prstGeom prst="line">
             <a:avLst/>
@@ -5125,7 +5125,7 @@
         </p:nvSpPr>
         <p:spPr>
           <a:xfrm>
-            <a:off x="8504632" y="2636502"/>
+            <a:off x="8513254" y="2647537"/>
             <a:ext cx="657352" cy="349250"/>
           </a:xfrm>
           <a:prstGeom prst="rect">
@@ -5164,7 +5164,7 @@
         </p:nvSpPr>
         <p:spPr>
           <a:xfrm>
-            <a:off x="10515580" y="3048635"/>
+            <a:off x="10410647" y="3048635"/>
             <a:ext cx="657352" cy="349250"/>
           </a:xfrm>
           <a:prstGeom prst="rect">
@@ -12156,7 +12156,7 @@
           </p:nvPr>
         </p:nvGraphicFramePr>
         <p:xfrm>
-          <a:off x="1065276" y="2042160"/>
+          <a:off x="1065276" y="2019300"/>
           <a:ext cx="10058400" cy="914400"/>
         </p:xfrm>
         <a:graphic>
@@ -12169,7 +12169,7 @@
                 <a:gridCol w="2313432"/>
                 <a:gridCol w="2313432"/>
               </a:tblGrid>
-              <a:tr h="472440">
+              <a:tr h="481584">
                 <a:tc>
                   <a:txBody>
                     <a:bodyPr/>
@@ -12432,7 +12432,7 @@
                   </a:tcPr>
                 </a:tc>
               </a:tr>
-              <a:tr h="472440">
+              <a:tr h="481584">
                 <a:tc>
                   <a:txBody>
                     <a:bodyPr/>
@@ -12706,7 +12706,7 @@
                   </a:tcPr>
                 </a:tc>
               </a:tr>
-              <a:tr h="472440">
+              <a:tr h="481584">
                 <a:tc>
                   <a:txBody>
                     <a:bodyPr/>
@@ -12980,7 +12980,7 @@
                   </a:tcPr>
                 </a:tc>
               </a:tr>
-              <a:tr h="472440">
+              <a:tr h="481584">
                 <a:tc>
                   <a:txBody>
                     <a:bodyPr/>
@@ -13254,7 +13254,7 @@
                   </a:tcPr>
                 </a:tc>
               </a:tr>
-              <a:tr h="472440">
+              <a:tr h="481584">
                 <a:tc>
                   <a:txBody>
                     <a:bodyPr/>
@@ -15173,8 +15173,8 @@
         </p:nvSpPr>
         <p:spPr>
           <a:xfrm>
-            <a:off x="1769255" y="3357154"/>
-            <a:ext cx="3173904" cy="1515291"/>
+            <a:off x="1874188" y="3403136"/>
+            <a:ext cx="2981281" cy="1423329"/>
           </a:xfrm>
           <a:custGeom>
             <a:avLst/>
@@ -15183,15 +15183,15 @@
             <a:cxnLst/>
             <a:rect l="l" t="t" r="r" b="b"/>
             <a:pathLst>
-              <a:path w="3173904" h="1515291">
+              <a:path w="2981281" h="1423329">
                 <a:moveTo>
-                  <a:pt x="0" y="1515291"/>
+                  <a:pt x="0" y="1423329"/>
                 </a:moveTo>
                 <a:lnTo>
-                  <a:pt x="3173904" y="1515291"/>
-                </a:lnTo>
-                <a:lnTo>
-                  <a:pt x="3173904" y="0"/>
+                  <a:pt x="2981281" y="1423329"/>
+                </a:lnTo>
+                <a:lnTo>
+                  <a:pt x="2981281" y="0"/>
                 </a:lnTo>
                 <a:lnTo>
                   <a:pt x="0" y="0"/>
@@ -15219,8 +15219,8 @@
         </p:nvSpPr>
         <p:spPr>
           <a:xfrm>
-            <a:off x="1927098" y="2346960"/>
-            <a:ext cx="1010194" cy="1010194"/>
+            <a:off x="2022452" y="2454250"/>
+            <a:ext cx="948886" cy="948886"/>
           </a:xfrm>
           <a:prstGeom prst="ellipse">
             <a:avLst/>
@@ -15244,8 +15244,8 @@
         </p:nvSpPr>
         <p:spPr>
           <a:xfrm>
-            <a:off x="1927098" y="4872446"/>
-            <a:ext cx="1010194" cy="1010194"/>
+            <a:off x="2022452" y="4826464"/>
+            <a:ext cx="948886" cy="948886"/>
           </a:xfrm>
           <a:prstGeom prst="ellipse">
             <a:avLst/>
@@ -15269,8 +15269,8 @@
         </p:nvSpPr>
         <p:spPr>
           <a:xfrm>
-            <a:off x="1769255" y="3932965"/>
-            <a:ext cx="3173904" cy="0"/>
+            <a:off x="1874188" y="3944001"/>
+            <a:ext cx="2981281" cy="0"/>
           </a:xfrm>
           <a:prstGeom prst="line">
             <a:avLst/>
@@ -15294,8 +15294,8 @@
         </p:nvSpPr>
         <p:spPr>
           <a:xfrm flipV="1">
-            <a:off x="5227276" y="3357154"/>
-            <a:ext cx="0" cy="1515291"/>
+            <a:off x="5122343" y="3403136"/>
+            <a:ext cx="0" cy="1423329"/>
           </a:xfrm>
           <a:prstGeom prst="line">
             <a:avLst/>
@@ -15319,7 +15319,7 @@
         </p:nvSpPr>
         <p:spPr>
           <a:xfrm>
-            <a:off x="5256232" y="3940175"/>
+            <a:off x="5151299" y="3940175"/>
             <a:ext cx="657352" cy="349250"/>
           </a:xfrm>
           <a:prstGeom prst="rect">
@@ -15358,7 +15358,7 @@
         </p:nvSpPr>
         <p:spPr>
           <a:xfrm>
-            <a:off x="2574588" y="3493164"/>
+            <a:off x="2583228" y="3520293"/>
             <a:ext cx="1562608" cy="349250"/>
           </a:xfrm>
           <a:prstGeom prst="rect">
@@ -15397,7 +15397,7 @@
         </p:nvSpPr>
         <p:spPr>
           <a:xfrm>
-            <a:off x="3027216" y="4318998"/>
+            <a:off x="3035856" y="4296007"/>
             <a:ext cx="657352" cy="349250"/>
           </a:xfrm>
           <a:prstGeom prst="rect">
@@ -15436,7 +15436,7 @@
         </p:nvSpPr>
         <p:spPr>
           <a:xfrm>
-            <a:off x="3082145" y="2677432"/>
+            <a:off x="3087452" y="2754068"/>
             <a:ext cx="657352" cy="349250"/>
           </a:xfrm>
           <a:prstGeom prst="rect">
@@ -15475,7 +15475,7 @@
         </p:nvSpPr>
         <p:spPr>
           <a:xfrm>
-            <a:off x="3082145" y="5202918"/>
+            <a:off x="3087452" y="5126282"/>
             <a:ext cx="657352" cy="349250"/>
           </a:xfrm>
           <a:prstGeom prst="rect">
